--- a/atelier/atelier-x05-email-header.pptx
+++ b/atelier/atelier-x05-email-header.pptx
@@ -3316,8 +3316,8 @@
         </p:nvSpPr>
         <p:spPr>
           <a:xfrm>
-            <a:off x="9231213" y="1704975"/>
-            <a:ext cx="9525" cy="400050"/>
+            <a:off x="9231213" y="1726853"/>
+            <a:ext cx="9525" cy="356146"/>
           </a:xfrm>
           <a:prstGeom prst="rect">
             <a:avLst/>
@@ -3399,7 +3399,7 @@
         </p:nvSpPr>
         <p:spPr>
           <a:xfrm>
-            <a:off x="1885950" y="1323975"/>
+            <a:off x="1885950" y="1396008"/>
             <a:ext cx="11523821" cy="114300"/>
           </a:xfrm>
           <a:prstGeom prst="rect">
@@ -3434,8 +3434,8 @@
         </p:nvSpPr>
         <p:spPr>
           <a:xfrm>
-            <a:off x="1885950" y="1533525"/>
-            <a:ext cx="11523821" cy="704850"/>
+            <a:off x="1885950" y="1605558"/>
+            <a:ext cx="11523821" cy="560784"/>
           </a:xfrm>
           <a:prstGeom prst="rect">
             <a:avLst/>
@@ -3446,7 +3446,11 @@
           <a:bodyPr wrap="none" anchor="t" lIns="0" rIns="0" tIns="0" bIns="0"/>
           <a:lstStyle/>
           <a:p>
-            <a:pPr algn="l"/>
+            <a:pPr algn="l">
+              <a:lnSpc>
+                <a:spcPct val="92000"/>
+              </a:lnSpc>
+            </a:pPr>
             <a:r>
               <a:rPr sz="4800" i="1" b="0">
                 <a:solidFill>
@@ -3469,7 +3473,7 @@
         </p:nvSpPr>
         <p:spPr>
           <a:xfrm>
-            <a:off x="1885950" y="2333625"/>
+            <a:off x="1885950" y="2261592"/>
             <a:ext cx="11523821" cy="152400"/>
           </a:xfrm>
           <a:prstGeom prst="rect">
@@ -3504,8 +3508,8 @@
         </p:nvSpPr>
         <p:spPr>
           <a:xfrm>
-            <a:off x="8494871" y="1704975"/>
-            <a:ext cx="2268379" cy="219075"/>
+            <a:off x="8494871" y="1726853"/>
+            <a:ext cx="2268379" cy="175171"/>
           </a:xfrm>
           <a:prstGeom prst="rect">
             <a:avLst/>
@@ -3516,7 +3520,11 @@
           <a:bodyPr wrap="none" anchor="t" lIns="0" rIns="0" tIns="0" bIns="0"/>
           <a:lstStyle/>
           <a:p>
-            <a:pPr algn="r"/>
+            <a:pPr algn="r">
+              <a:lnSpc>
+                <a:spcPct val="92000"/>
+              </a:lnSpc>
+            </a:pPr>
             <a:r>
               <a:rPr sz="1500" i="1" b="0">
                 <a:solidFill>
@@ -3539,7 +3547,7 @@
         </p:nvSpPr>
         <p:spPr>
           <a:xfrm>
-            <a:off x="8494871" y="2000250"/>
+            <a:off x="8494871" y="1978223"/>
             <a:ext cx="2268379" cy="104775"/>
           </a:xfrm>
           <a:prstGeom prst="rect">
